--- a/curso_es/pptx/S12.pptx
+++ b/curso_es/pptx/S12.pptx
@@ -7476,7 +7476,7 @@
                           </a:solidFill>
                           <a:latin typeface="Nunito Sans"/>
                         </a:rPr>
-                        <a:t>Todos los de 2.º tienen Inglés; Aitor es de 2.º…</a:t>
+                        <a:t>Todos los de 2.º tienen Inglés; un chico es de 2.º…</a:t>
                       </a:r>
                     </a:p>
                   </a:txBody>
